--- a/information-flow.pptx
+++ b/information-flow.pptx
@@ -104,6 +104,11 @@
       </a:defRPr>
     </a:lvl9pPr>
   </p:defaultTextStyle>
+  <p:extLst>
+    <p:ext uri="{EFAFB233-063F-42B5-8137-9DF3F51BA10A}">
+      <p15:sldGuideLst xmlns:p15="http://schemas.microsoft.com/office/powerpoint/2012/main"/>
+    </p:ext>
+  </p:extLst>
 </p:presentation>
 </file>
 
@@ -2982,8 +2987,8 @@
         </p:nvSpPr>
         <p:spPr>
           <a:xfrm>
-            <a:off x="2313542" y="1189821"/>
-            <a:ext cx="2886420" cy="369332"/>
+            <a:off x="2313541" y="1189821"/>
+            <a:ext cx="3183875" cy="369332"/>
           </a:xfrm>
           <a:prstGeom prst="rect">
             <a:avLst/>
@@ -3004,7 +3009,7 @@
             <a:pPr algn="ctr"/>
             <a:r>
               <a:rPr lang="en-US" dirty="0"/>
-              <a:t>Physical plastic package</a:t>
+              <a:t>Physical Amplifiers + Boxes</a:t>
             </a:r>
           </a:p>
         </p:txBody>
@@ -3023,8 +3028,8 @@
         </p:nvSpPr>
         <p:spPr>
           <a:xfrm>
-            <a:off x="2313542" y="2049137"/>
-            <a:ext cx="2886420" cy="369332"/>
+            <a:off x="2313541" y="2049137"/>
+            <a:ext cx="3183875" cy="369332"/>
           </a:xfrm>
           <a:prstGeom prst="rect">
             <a:avLst/>
@@ -3045,7 +3050,7 @@
             <a:pPr algn="ctr"/>
             <a:r>
               <a:rPr lang="en-US" dirty="0"/>
-              <a:t>HTML</a:t>
+              <a:t>HTML/CSS/JS/PHP/Markdown</a:t>
             </a:r>
           </a:p>
         </p:txBody>
@@ -3064,8 +3069,8 @@
         </p:nvSpPr>
         <p:spPr>
           <a:xfrm>
-            <a:off x="2313542" y="2908453"/>
-            <a:ext cx="2886420" cy="369332"/>
+            <a:off x="2313541" y="2908453"/>
+            <a:ext cx="3183875" cy="369332"/>
           </a:xfrm>
           <a:prstGeom prst="rect">
             <a:avLst/>
@@ -3105,8 +3110,8 @@
         </p:nvSpPr>
         <p:spPr>
           <a:xfrm>
-            <a:off x="2313542" y="3767769"/>
-            <a:ext cx="2886420" cy="369332"/>
+            <a:off x="2313541" y="3767769"/>
+            <a:ext cx="3183875" cy="369332"/>
           </a:xfrm>
           <a:prstGeom prst="rect">
             <a:avLst/>
@@ -3127,7 +3132,7 @@
             <a:pPr algn="ctr"/>
             <a:r>
               <a:rPr lang="en-US" dirty="0"/>
-              <a:t>Instrument Rack</a:t>
+              <a:t>Notebook and Lab</a:t>
             </a:r>
           </a:p>
         </p:txBody>
@@ -3146,7 +3151,7 @@
         </p:nvSpPr>
         <p:spPr>
           <a:xfrm>
-            <a:off x="3631435" y="1688468"/>
+            <a:off x="3760883" y="1710501"/>
             <a:ext cx="250634" cy="231354"/>
           </a:xfrm>
           <a:prstGeom prst="downArrow">
@@ -3200,7 +3205,7 @@
         </p:nvSpPr>
         <p:spPr>
           <a:xfrm>
-            <a:off x="3631435" y="2547784"/>
+            <a:off x="3760883" y="2569817"/>
             <a:ext cx="250634" cy="231354"/>
           </a:xfrm>
           <a:prstGeom prst="downArrow">
@@ -3254,7 +3259,7 @@
         </p:nvSpPr>
         <p:spPr>
           <a:xfrm>
-            <a:off x="3631435" y="3407100"/>
+            <a:off x="3760883" y="3429133"/>
             <a:ext cx="250634" cy="231354"/>
           </a:xfrm>
           <a:prstGeom prst="downArrow">
